--- a/deck/Governance-for-M365.pptx
+++ b/deck/Governance-for-M365.pptx
@@ -5,20 +5,20 @@
     <p:sldMasterId id="2147483648" r:id="rId1"/>
   </p:sldMasterIdLst>
   <p:sldIdLst>
-    <p:sldId id="256" r:id="rId7"/>
-    <p:sldId id="257" r:id="rId8"/>
-    <p:sldId id="258" r:id="rId9"/>
-    <p:sldId id="259" r:id="rId10"/>
-    <p:sldId id="260" r:id="rId11"/>
-    <p:sldId id="261" r:id="rId12"/>
-    <p:sldId id="262" r:id="rId13"/>
-    <p:sldId id="263" r:id="rId14"/>
-    <p:sldId id="264" r:id="rId15"/>
-    <p:sldId id="265" r:id="rId16"/>
-    <p:sldId id="266" r:id="rId17"/>
-    <p:sldId id="267" r:id="rId18"/>
+    <p:sldId id="256" r:id="rId2"/>
+    <p:sldId id="257" r:id="rId3"/>
+    <p:sldId id="258" r:id="rId4"/>
+    <p:sldId id="259" r:id="rId5"/>
+    <p:sldId id="260" r:id="rId6"/>
+    <p:sldId id="261" r:id="rId7"/>
+    <p:sldId id="262" r:id="rId8"/>
+    <p:sldId id="263" r:id="rId9"/>
+    <p:sldId id="264" r:id="rId10"/>
+    <p:sldId id="265" r:id="rId11"/>
+    <p:sldId id="266" r:id="rId12"/>
+    <p:sldId id="267" r:id="rId13"/>
   </p:sldIdLst>
-  <p:sldSz cx="12191695" cy="6858000" type="screen4x3"/>
+  <p:sldSz cx="12192000" cy="6858000"/>
   <p:notesSz cx="6858000" cy="9144000"/>
   <p:defaultTextStyle>
     <a:defPPr>
@@ -115,6 +115,22 @@
       </a:defRPr>
     </a:lvl9pPr>
   </p:defaultTextStyle>
+  <p:extLst>
+    <p:ext uri="{EFAFB233-063F-42B5-8137-9DF3F51BA10A}">
+      <p15:sldGuideLst xmlns:p15="http://schemas.microsoft.com/office/powerpoint/2012/main">
+        <p15:guide id="1" orient="horz" pos="2160">
+          <p15:clr>
+            <a:srgbClr val="A4A3A4"/>
+          </p15:clr>
+        </p15:guide>
+        <p15:guide id="2" pos="2880">
+          <p15:clr>
+            <a:srgbClr val="A4A3A4"/>
+          </p15:clr>
+        </p15:guide>
+      </p15:sldGuideLst>
+    </p:ext>
+  </p:extLst>
 </p:presentation>
 </file>
 
@@ -156,10 +172,9 @@
           <a:lstStyle/>
           <a:p>
             <a:r>
-              <a:rPr lang="en-US" smtClean="0"/>
+              <a:rPr lang="en-US"/>
               <a:t>Click to edit Master title style</a:t>
             </a:r>
-            <a:endParaRPr lang="en-US"/>
           </a:p>
         </p:txBody>
       </p:sp>
@@ -275,10 +290,9 @@
           </a:lstStyle>
           <a:p>
             <a:r>
-              <a:rPr lang="en-US" smtClean="0"/>
+              <a:rPr lang="en-US"/>
               <a:t>Click to edit Master subtitle style</a:t>
             </a:r>
-            <a:endParaRPr lang="en-US"/>
           </a:p>
         </p:txBody>
       </p:sp>
@@ -299,7 +313,7 @@
           <a:p>
             <a:fld id="{5BCAD085-E8A6-8845-BD4E-CB4CCA059FC4}" type="datetimeFigureOut">
               <a:rPr lang="en-US" smtClean="0"/>
-              <a:t>1/27/13</a:t>
+              <a:t>10/16/2026</a:t>
             </a:fld>
             <a:endParaRPr lang="en-US"/>
           </a:p>
@@ -393,10 +407,9 @@
           <a:lstStyle/>
           <a:p>
             <a:r>
-              <a:rPr lang="en-US" smtClean="0"/>
+              <a:rPr lang="en-US"/>
               <a:t>Click to edit Master title style</a:t>
             </a:r>
-            <a:endParaRPr lang="en-US"/>
           </a:p>
         </p:txBody>
       </p:sp>
@@ -417,38 +430,37 @@
           <a:p>
             <a:pPr lvl="0"/>
             <a:r>
-              <a:rPr lang="en-US" smtClean="0"/>
+              <a:rPr lang="en-US"/>
               <a:t>Click to edit Master text styles</a:t>
             </a:r>
           </a:p>
           <a:p>
             <a:pPr lvl="1"/>
             <a:r>
-              <a:rPr lang="en-US" smtClean="0"/>
+              <a:rPr lang="en-US"/>
               <a:t>Second level</a:t>
             </a:r>
           </a:p>
           <a:p>
             <a:pPr lvl="2"/>
             <a:r>
-              <a:rPr lang="en-US" smtClean="0"/>
+              <a:rPr lang="en-US"/>
               <a:t>Third level</a:t>
             </a:r>
           </a:p>
           <a:p>
             <a:pPr lvl="3"/>
             <a:r>
-              <a:rPr lang="en-US" smtClean="0"/>
+              <a:rPr lang="en-US"/>
               <a:t>Fourth level</a:t>
             </a:r>
           </a:p>
           <a:p>
             <a:pPr lvl="4"/>
             <a:r>
-              <a:rPr lang="en-US" smtClean="0"/>
+              <a:rPr lang="en-US"/>
               <a:t>Fifth level</a:t>
             </a:r>
-            <a:endParaRPr lang="en-US"/>
           </a:p>
         </p:txBody>
       </p:sp>
@@ -469,7 +481,7 @@
           <a:p>
             <a:fld id="{5BCAD085-E8A6-8845-BD4E-CB4CCA059FC4}" type="datetimeFigureOut">
               <a:rPr lang="en-US" smtClean="0"/>
-              <a:t>1/27/13</a:t>
+              <a:t>10/16/2026</a:t>
             </a:fld>
             <a:endParaRPr lang="en-US"/>
           </a:p>
@@ -568,10 +580,9 @@
           <a:lstStyle/>
           <a:p>
             <a:r>
-              <a:rPr lang="en-US" smtClean="0"/>
+              <a:rPr lang="en-US"/>
               <a:t>Click to edit Master title style</a:t>
             </a:r>
-            <a:endParaRPr lang="en-US"/>
           </a:p>
         </p:txBody>
       </p:sp>
@@ -597,38 +608,37 @@
           <a:p>
             <a:pPr lvl="0"/>
             <a:r>
-              <a:rPr lang="en-US" smtClean="0"/>
+              <a:rPr lang="en-US"/>
               <a:t>Click to edit Master text styles</a:t>
             </a:r>
           </a:p>
           <a:p>
             <a:pPr lvl="1"/>
             <a:r>
-              <a:rPr lang="en-US" smtClean="0"/>
+              <a:rPr lang="en-US"/>
               <a:t>Second level</a:t>
             </a:r>
           </a:p>
           <a:p>
             <a:pPr lvl="2"/>
             <a:r>
-              <a:rPr lang="en-US" smtClean="0"/>
+              <a:rPr lang="en-US"/>
               <a:t>Third level</a:t>
             </a:r>
           </a:p>
           <a:p>
             <a:pPr lvl="3"/>
             <a:r>
-              <a:rPr lang="en-US" smtClean="0"/>
+              <a:rPr lang="en-US"/>
               <a:t>Fourth level</a:t>
             </a:r>
           </a:p>
           <a:p>
             <a:pPr lvl="4"/>
             <a:r>
-              <a:rPr lang="en-US" smtClean="0"/>
+              <a:rPr lang="en-US"/>
               <a:t>Fifth level</a:t>
             </a:r>
-            <a:endParaRPr lang="en-US"/>
           </a:p>
         </p:txBody>
       </p:sp>
@@ -649,7 +659,7 @@
           <a:p>
             <a:fld id="{5BCAD085-E8A6-8845-BD4E-CB4CCA059FC4}" type="datetimeFigureOut">
               <a:rPr lang="en-US" smtClean="0"/>
-              <a:t>1/27/13</a:t>
+              <a:t>10/16/2026</a:t>
             </a:fld>
             <a:endParaRPr lang="en-US"/>
           </a:p>
@@ -743,10 +753,9 @@
           <a:lstStyle/>
           <a:p>
             <a:r>
-              <a:rPr lang="en-US" smtClean="0"/>
+              <a:rPr lang="en-US"/>
               <a:t>Click to edit Master title style</a:t>
             </a:r>
-            <a:endParaRPr lang="en-US"/>
           </a:p>
         </p:txBody>
       </p:sp>
@@ -767,38 +776,37 @@
           <a:p>
             <a:pPr lvl="0"/>
             <a:r>
-              <a:rPr lang="en-US" smtClean="0"/>
+              <a:rPr lang="en-US"/>
               <a:t>Click to edit Master text styles</a:t>
             </a:r>
           </a:p>
           <a:p>
             <a:pPr lvl="1"/>
             <a:r>
-              <a:rPr lang="en-US" smtClean="0"/>
+              <a:rPr lang="en-US"/>
               <a:t>Second level</a:t>
             </a:r>
           </a:p>
           <a:p>
             <a:pPr lvl="2"/>
             <a:r>
-              <a:rPr lang="en-US" smtClean="0"/>
+              <a:rPr lang="en-US"/>
               <a:t>Third level</a:t>
             </a:r>
           </a:p>
           <a:p>
             <a:pPr lvl="3"/>
             <a:r>
-              <a:rPr lang="en-US" smtClean="0"/>
+              <a:rPr lang="en-US"/>
               <a:t>Fourth level</a:t>
             </a:r>
           </a:p>
           <a:p>
             <a:pPr lvl="4"/>
             <a:r>
-              <a:rPr lang="en-US" smtClean="0"/>
+              <a:rPr lang="en-US"/>
               <a:t>Fifth level</a:t>
             </a:r>
-            <a:endParaRPr lang="en-US"/>
           </a:p>
         </p:txBody>
       </p:sp>
@@ -819,7 +827,7 @@
           <a:p>
             <a:fld id="{5BCAD085-E8A6-8845-BD4E-CB4CCA059FC4}" type="datetimeFigureOut">
               <a:rPr lang="en-US" smtClean="0"/>
-              <a:t>1/27/13</a:t>
+              <a:t>10/16/2026</a:t>
             </a:fld>
             <a:endParaRPr lang="en-US"/>
           </a:p>
@@ -922,10 +930,9 @@
           </a:lstStyle>
           <a:p>
             <a:r>
-              <a:rPr lang="en-US" smtClean="0"/>
+              <a:rPr lang="en-US"/>
               <a:t>Click to edit Master title style</a:t>
             </a:r>
-            <a:endParaRPr lang="en-US"/>
           </a:p>
         </p:txBody>
       </p:sp>
@@ -1042,7 +1049,7 @@
           <a:p>
             <a:pPr lvl="0"/>
             <a:r>
-              <a:rPr lang="en-US" smtClean="0"/>
+              <a:rPr lang="en-US"/>
               <a:t>Click to edit Master text styles</a:t>
             </a:r>
           </a:p>
@@ -1065,7 +1072,7 @@
           <a:p>
             <a:fld id="{5BCAD085-E8A6-8845-BD4E-CB4CCA059FC4}" type="datetimeFigureOut">
               <a:rPr lang="en-US" smtClean="0"/>
-              <a:t>1/27/13</a:t>
+              <a:t>10/16/2026</a:t>
             </a:fld>
             <a:endParaRPr lang="en-US"/>
           </a:p>
@@ -1159,10 +1166,9 @@
           <a:lstStyle/>
           <a:p>
             <a:r>
-              <a:rPr lang="en-US" smtClean="0"/>
+              <a:rPr lang="en-US"/>
               <a:t>Click to edit Master title style</a:t>
             </a:r>
-            <a:endParaRPr lang="en-US"/>
           </a:p>
         </p:txBody>
       </p:sp>
@@ -1216,38 +1222,37 @@
           <a:p>
             <a:pPr lvl="0"/>
             <a:r>
-              <a:rPr lang="en-US" smtClean="0"/>
+              <a:rPr lang="en-US"/>
               <a:t>Click to edit Master text styles</a:t>
             </a:r>
           </a:p>
           <a:p>
             <a:pPr lvl="1"/>
             <a:r>
-              <a:rPr lang="en-US" smtClean="0"/>
+              <a:rPr lang="en-US"/>
               <a:t>Second level</a:t>
             </a:r>
           </a:p>
           <a:p>
             <a:pPr lvl="2"/>
             <a:r>
-              <a:rPr lang="en-US" smtClean="0"/>
+              <a:rPr lang="en-US"/>
               <a:t>Third level</a:t>
             </a:r>
           </a:p>
           <a:p>
             <a:pPr lvl="3"/>
             <a:r>
-              <a:rPr lang="en-US" smtClean="0"/>
+              <a:rPr lang="en-US"/>
               <a:t>Fourth level</a:t>
             </a:r>
           </a:p>
           <a:p>
             <a:pPr lvl="4"/>
             <a:r>
-              <a:rPr lang="en-US" smtClean="0"/>
+              <a:rPr lang="en-US"/>
               <a:t>Fifth level</a:t>
             </a:r>
-            <a:endParaRPr lang="en-US"/>
           </a:p>
         </p:txBody>
       </p:sp>
@@ -1301,38 +1306,37 @@
           <a:p>
             <a:pPr lvl="0"/>
             <a:r>
-              <a:rPr lang="en-US" smtClean="0"/>
+              <a:rPr lang="en-US"/>
               <a:t>Click to edit Master text styles</a:t>
             </a:r>
           </a:p>
           <a:p>
             <a:pPr lvl="1"/>
             <a:r>
-              <a:rPr lang="en-US" smtClean="0"/>
+              <a:rPr lang="en-US"/>
               <a:t>Second level</a:t>
             </a:r>
           </a:p>
           <a:p>
             <a:pPr lvl="2"/>
             <a:r>
-              <a:rPr lang="en-US" smtClean="0"/>
+              <a:rPr lang="en-US"/>
               <a:t>Third level</a:t>
             </a:r>
           </a:p>
           <a:p>
             <a:pPr lvl="3"/>
             <a:r>
-              <a:rPr lang="en-US" smtClean="0"/>
+              <a:rPr lang="en-US"/>
               <a:t>Fourth level</a:t>
             </a:r>
           </a:p>
           <a:p>
             <a:pPr lvl="4"/>
             <a:r>
-              <a:rPr lang="en-US" smtClean="0"/>
+              <a:rPr lang="en-US"/>
               <a:t>Fifth level</a:t>
             </a:r>
-            <a:endParaRPr lang="en-US"/>
           </a:p>
         </p:txBody>
       </p:sp>
@@ -1353,7 +1357,7 @@
           <a:p>
             <a:fld id="{5BCAD085-E8A6-8845-BD4E-CB4CCA059FC4}" type="datetimeFigureOut">
               <a:rPr lang="en-US" smtClean="0"/>
-              <a:t>1/27/13</a:t>
+              <a:t>10/16/2026</a:t>
             </a:fld>
             <a:endParaRPr lang="en-US"/>
           </a:p>
@@ -1451,10 +1455,9 @@
           </a:lstStyle>
           <a:p>
             <a:r>
-              <a:rPr lang="en-US" smtClean="0"/>
+              <a:rPr lang="en-US"/>
               <a:t>Click to edit Master title style</a:t>
             </a:r>
-            <a:endParaRPr lang="en-US"/>
           </a:p>
         </p:txBody>
       </p:sp>
@@ -1517,7 +1520,7 @@
           <a:p>
             <a:pPr lvl="0"/>
             <a:r>
-              <a:rPr lang="en-US" smtClean="0"/>
+              <a:rPr lang="en-US"/>
               <a:t>Click to edit Master text styles</a:t>
             </a:r>
           </a:p>
@@ -1573,38 +1576,37 @@
           <a:p>
             <a:pPr lvl="0"/>
             <a:r>
-              <a:rPr lang="en-US" smtClean="0"/>
+              <a:rPr lang="en-US"/>
               <a:t>Click to edit Master text styles</a:t>
             </a:r>
           </a:p>
           <a:p>
             <a:pPr lvl="1"/>
             <a:r>
-              <a:rPr lang="en-US" smtClean="0"/>
+              <a:rPr lang="en-US"/>
               <a:t>Second level</a:t>
             </a:r>
           </a:p>
           <a:p>
             <a:pPr lvl="2"/>
             <a:r>
-              <a:rPr lang="en-US" smtClean="0"/>
+              <a:rPr lang="en-US"/>
               <a:t>Third level</a:t>
             </a:r>
           </a:p>
           <a:p>
             <a:pPr lvl="3"/>
             <a:r>
-              <a:rPr lang="en-US" smtClean="0"/>
+              <a:rPr lang="en-US"/>
               <a:t>Fourth level</a:t>
             </a:r>
           </a:p>
           <a:p>
             <a:pPr lvl="4"/>
             <a:r>
-              <a:rPr lang="en-US" smtClean="0"/>
+              <a:rPr lang="en-US"/>
               <a:t>Fifth level</a:t>
             </a:r>
-            <a:endParaRPr lang="en-US"/>
           </a:p>
         </p:txBody>
       </p:sp>
@@ -1667,7 +1669,7 @@
           <a:p>
             <a:pPr lvl="0"/>
             <a:r>
-              <a:rPr lang="en-US" smtClean="0"/>
+              <a:rPr lang="en-US"/>
               <a:t>Click to edit Master text styles</a:t>
             </a:r>
           </a:p>
@@ -1723,38 +1725,37 @@
           <a:p>
             <a:pPr lvl="0"/>
             <a:r>
-              <a:rPr lang="en-US" smtClean="0"/>
+              <a:rPr lang="en-US"/>
               <a:t>Click to edit Master text styles</a:t>
             </a:r>
           </a:p>
           <a:p>
             <a:pPr lvl="1"/>
             <a:r>
-              <a:rPr lang="en-US" smtClean="0"/>
+              <a:rPr lang="en-US"/>
               <a:t>Second level</a:t>
             </a:r>
           </a:p>
           <a:p>
             <a:pPr lvl="2"/>
             <a:r>
-              <a:rPr lang="en-US" smtClean="0"/>
+              <a:rPr lang="en-US"/>
               <a:t>Third level</a:t>
             </a:r>
           </a:p>
           <a:p>
             <a:pPr lvl="3"/>
             <a:r>
-              <a:rPr lang="en-US" smtClean="0"/>
+              <a:rPr lang="en-US"/>
               <a:t>Fourth level</a:t>
             </a:r>
           </a:p>
           <a:p>
             <a:pPr lvl="4"/>
             <a:r>
-              <a:rPr lang="en-US" smtClean="0"/>
+              <a:rPr lang="en-US"/>
               <a:t>Fifth level</a:t>
             </a:r>
-            <a:endParaRPr lang="en-US"/>
           </a:p>
         </p:txBody>
       </p:sp>
@@ -1775,7 +1776,7 @@
           <a:p>
             <a:fld id="{5BCAD085-E8A6-8845-BD4E-CB4CCA059FC4}" type="datetimeFigureOut">
               <a:rPr lang="en-US" smtClean="0"/>
-              <a:t>1/27/13</a:t>
+              <a:t>10/16/2026</a:t>
             </a:fld>
             <a:endParaRPr lang="en-US"/>
           </a:p>
@@ -1869,10 +1870,9 @@
           <a:lstStyle/>
           <a:p>
             <a:r>
-              <a:rPr lang="en-US" smtClean="0"/>
+              <a:rPr lang="en-US"/>
               <a:t>Click to edit Master title style</a:t>
             </a:r>
-            <a:endParaRPr lang="en-US"/>
           </a:p>
         </p:txBody>
       </p:sp>
@@ -1893,7 +1893,7 @@
           <a:p>
             <a:fld id="{5BCAD085-E8A6-8845-BD4E-CB4CCA059FC4}" type="datetimeFigureOut">
               <a:rPr lang="en-US" smtClean="0"/>
-              <a:t>1/27/13</a:t>
+              <a:t>10/16/2026</a:t>
             </a:fld>
             <a:endParaRPr lang="en-US"/>
           </a:p>
@@ -1988,7 +1988,7 @@
           <a:p>
             <a:fld id="{5BCAD085-E8A6-8845-BD4E-CB4CCA059FC4}" type="datetimeFigureOut">
               <a:rPr lang="en-US" smtClean="0"/>
-              <a:t>1/27/13</a:t>
+              <a:t>10/16/2026</a:t>
             </a:fld>
             <a:endParaRPr lang="en-US"/>
           </a:p>
@@ -2091,10 +2091,9 @@
           </a:lstStyle>
           <a:p>
             <a:r>
-              <a:rPr lang="en-US" smtClean="0"/>
+              <a:rPr lang="en-US"/>
               <a:t>Click to edit Master title style</a:t>
             </a:r>
-            <a:endParaRPr lang="en-US"/>
           </a:p>
         </p:txBody>
       </p:sp>
@@ -2148,38 +2147,37 @@
           <a:p>
             <a:pPr lvl="0"/>
             <a:r>
-              <a:rPr lang="en-US" smtClean="0"/>
+              <a:rPr lang="en-US"/>
               <a:t>Click to edit Master text styles</a:t>
             </a:r>
           </a:p>
           <a:p>
             <a:pPr lvl="1"/>
             <a:r>
-              <a:rPr lang="en-US" smtClean="0"/>
+              <a:rPr lang="en-US"/>
               <a:t>Second level</a:t>
             </a:r>
           </a:p>
           <a:p>
             <a:pPr lvl="2"/>
             <a:r>
-              <a:rPr lang="en-US" smtClean="0"/>
+              <a:rPr lang="en-US"/>
               <a:t>Third level</a:t>
             </a:r>
           </a:p>
           <a:p>
             <a:pPr lvl="3"/>
             <a:r>
-              <a:rPr lang="en-US" smtClean="0"/>
+              <a:rPr lang="en-US"/>
               <a:t>Fourth level</a:t>
             </a:r>
           </a:p>
           <a:p>
             <a:pPr lvl="4"/>
             <a:r>
-              <a:rPr lang="en-US" smtClean="0"/>
+              <a:rPr lang="en-US"/>
               <a:t>Fifth level</a:t>
             </a:r>
-            <a:endParaRPr lang="en-US"/>
           </a:p>
         </p:txBody>
       </p:sp>
@@ -2242,7 +2240,7 @@
           <a:p>
             <a:pPr lvl="0"/>
             <a:r>
-              <a:rPr lang="en-US" smtClean="0"/>
+              <a:rPr lang="en-US"/>
               <a:t>Click to edit Master text styles</a:t>
             </a:r>
           </a:p>
@@ -2265,7 +2263,7 @@
           <a:p>
             <a:fld id="{5BCAD085-E8A6-8845-BD4E-CB4CCA059FC4}" type="datetimeFigureOut">
               <a:rPr lang="en-US" smtClean="0"/>
-              <a:t>1/27/13</a:t>
+              <a:t>10/16/2026</a:t>
             </a:fld>
             <a:endParaRPr lang="en-US"/>
           </a:p>
@@ -2368,10 +2366,9 @@
           </a:lstStyle>
           <a:p>
             <a:r>
-              <a:rPr lang="en-US" smtClean="0"/>
+              <a:rPr lang="en-US"/>
               <a:t>Click to edit Master title style</a:t>
             </a:r>
-            <a:endParaRPr lang="en-US"/>
           </a:p>
         </p:txBody>
       </p:sp>
@@ -2495,7 +2492,7 @@
           <a:p>
             <a:pPr lvl="0"/>
             <a:r>
-              <a:rPr lang="en-US" smtClean="0"/>
+              <a:rPr lang="en-US"/>
               <a:t>Click to edit Master text styles</a:t>
             </a:r>
           </a:p>
@@ -2518,7 +2515,7 @@
           <a:p>
             <a:fld id="{5BCAD085-E8A6-8845-BD4E-CB4CCA059FC4}" type="datetimeFigureOut">
               <a:rPr lang="en-US" smtClean="0"/>
-              <a:t>1/27/13</a:t>
+              <a:t>10/16/2026</a:t>
             </a:fld>
             <a:endParaRPr lang="en-US"/>
           </a:p>
@@ -2627,10 +2624,9 @@
           <a:lstStyle/>
           <a:p>
             <a:r>
-              <a:rPr lang="en-US" smtClean="0"/>
+              <a:rPr lang="en-US"/>
               <a:t>Click to edit Master title style</a:t>
             </a:r>
-            <a:endParaRPr lang="en-US"/>
           </a:p>
         </p:txBody>
       </p:sp>
@@ -2661,38 +2657,37 @@
           <a:p>
             <a:pPr lvl="0"/>
             <a:r>
-              <a:rPr lang="en-US" smtClean="0"/>
+              <a:rPr lang="en-US"/>
               <a:t>Click to edit Master text styles</a:t>
             </a:r>
           </a:p>
           <a:p>
             <a:pPr lvl="1"/>
             <a:r>
-              <a:rPr lang="en-US" smtClean="0"/>
+              <a:rPr lang="en-US"/>
               <a:t>Second level</a:t>
             </a:r>
           </a:p>
           <a:p>
             <a:pPr lvl="2"/>
             <a:r>
-              <a:rPr lang="en-US" smtClean="0"/>
+              <a:rPr lang="en-US"/>
               <a:t>Third level</a:t>
             </a:r>
           </a:p>
           <a:p>
             <a:pPr lvl="3"/>
             <a:r>
-              <a:rPr lang="en-US" smtClean="0"/>
+              <a:rPr lang="en-US"/>
               <a:t>Fourth level</a:t>
             </a:r>
           </a:p>
           <a:p>
             <a:pPr lvl="4"/>
             <a:r>
-              <a:rPr lang="en-US" smtClean="0"/>
+              <a:rPr lang="en-US"/>
               <a:t>Fifth level</a:t>
             </a:r>
-            <a:endParaRPr lang="en-US"/>
           </a:p>
         </p:txBody>
       </p:sp>
@@ -2731,7 +2726,7 @@
           <a:p>
             <a:fld id="{5BCAD085-E8A6-8845-BD4E-CB4CCA059FC4}" type="datetimeFigureOut">
               <a:rPr lang="en-US" smtClean="0"/>
-              <a:t>1/27/13</a:t>
+              <a:t>10/16/2026</a:t>
             </a:fld>
             <a:endParaRPr lang="en-US"/>
           </a:p>
@@ -3090,7 +3085,7 @@
 </file>
 
 <file path=ppt/slides/slide1.xml><?xml version="1.0" encoding="utf-8"?>
-<p:sld xmlns:a="http://schemas.openxmlformats.org/drawingml/2006/main" xmlns:p="http://schemas.openxmlformats.org/presentationml/2006/main" xmlns:r="http://schemas.openxmlformats.org/officeDocument/2006/relationships">
+<p:sld xmlns:a="http://schemas.openxmlformats.org/drawingml/2006/main" xmlns:r="http://schemas.openxmlformats.org/officeDocument/2006/relationships" xmlns:p="http://schemas.openxmlformats.org/presentationml/2006/main">
   <p:cSld>
     <p:spTree>
       <p:nvGrpSpPr>
@@ -3098,7 +3093,14 @@
         <p:cNvGrpSpPr/>
         <p:nvPr/>
       </p:nvGrpSpPr>
-      <p:grpSpPr/>
+      <p:grpSpPr>
+        <a:xfrm>
+          <a:off x="0" y="0"/>
+          <a:ext cx="0" cy="0"/>
+          <a:chOff x="0" y="0"/>
+          <a:chExt cx="0" cy="0"/>
+        </a:xfrm>
+      </p:grpSpPr>
       <p:sp>
         <p:nvSpPr>
           <p:cNvPr id="2" name="Rectangle 1"/>
@@ -3140,6 +3142,7 @@
           <a:lstStyle/>
           <a:p>
             <a:pPr algn="ctr"/>
+            <a:endParaRPr/>
           </a:p>
         </p:txBody>
       </p:sp>
@@ -3184,6 +3187,7 @@
           <a:lstStyle/>
           <a:p>
             <a:pPr algn="ctr"/>
+            <a:endParaRPr/>
           </a:p>
         </p:txBody>
       </p:sp>
@@ -3228,6 +3232,7 @@
           <a:lstStyle/>
           <a:p>
             <a:pPr algn="ctr"/>
+            <a:endParaRPr/>
           </a:p>
         </p:txBody>
       </p:sp>
@@ -3274,6 +3279,7 @@
           <a:lstStyle/>
           <a:p>
             <a:pPr algn="ctr"/>
+            <a:endParaRPr/>
           </a:p>
         </p:txBody>
       </p:sp>
@@ -3285,7 +3291,7 @@
         </p:nvSpPr>
         <p:spPr>
           <a:xfrm>
-            <a:off x="822960" y="1009904"/>
+            <a:off x="915416" y="1009904"/>
             <a:ext cx="105664" cy="105664"/>
           </a:xfrm>
           <a:custGeom>
@@ -3336,6 +3342,7 @@
           <a:lstStyle/>
           <a:p>
             <a:pPr algn="ctr"/>
+            <a:endParaRPr/>
           </a:p>
         </p:txBody>
       </p:sp>
@@ -3380,6 +3387,7 @@
           <a:lstStyle/>
           <a:p>
             <a:pPr algn="ctr"/>
+            <a:endParaRPr/>
           </a:p>
         </p:txBody>
       </p:sp>
@@ -3424,6 +3432,7 @@
           <a:lstStyle/>
           <a:p>
             <a:pPr algn="ctr"/>
+            <a:endParaRPr/>
           </a:p>
         </p:txBody>
       </p:sp>
@@ -3444,7 +3453,7 @@
           <a:noFill/>
         </p:spPr>
         <p:txBody>
-          <a:bodyPr wrap="square" anchor="t" lIns="0" rIns="0" tIns="0" bIns="0">
+          <a:bodyPr wrap="square" lIns="0" tIns="0" rIns="0" bIns="0" anchor="t">
             <a:spAutoFit/>
           </a:bodyPr>
           <a:lstStyle/>
@@ -3488,7 +3497,7 @@
           <a:noFill/>
         </p:spPr>
         <p:txBody>
-          <a:bodyPr wrap="square" anchor="t" lIns="0" rIns="0" tIns="0" bIns="0">
+          <a:bodyPr wrap="square" lIns="0" tIns="0" rIns="0" bIns="0" anchor="t">
             <a:spAutoFit/>
           </a:bodyPr>
           <a:lstStyle/>
@@ -3523,7 +3532,7 @@
           <a:noFill/>
         </p:spPr>
         <p:txBody>
-          <a:bodyPr wrap="square" anchor="t" lIns="0" rIns="0" tIns="0" bIns="0">
+          <a:bodyPr wrap="square" lIns="0" tIns="0" rIns="0" bIns="0" anchor="t">
             <a:spAutoFit/>
           </a:bodyPr>
           <a:lstStyle/>
@@ -3562,7 +3571,7 @@
           <a:noFill/>
         </p:spPr>
         <p:txBody>
-          <a:bodyPr wrap="square" anchor="t" lIns="0" rIns="0" tIns="0" bIns="0">
+          <a:bodyPr wrap="square" lIns="0" tIns="0" rIns="0" bIns="0" anchor="t">
             <a:spAutoFit/>
           </a:bodyPr>
           <a:lstStyle/>
@@ -3597,7 +3606,7 @@
           <a:noFill/>
         </p:spPr>
         <p:txBody>
-          <a:bodyPr wrap="square" anchor="t" lIns="0" rIns="0" tIns="0" bIns="0">
+          <a:bodyPr wrap="square" lIns="0" tIns="0" rIns="0" bIns="0" anchor="t">
             <a:spAutoFit/>
           </a:bodyPr>
           <a:lstStyle/>
@@ -3685,6 +3694,7 @@
           <a:lstStyle/>
           <a:p>
             <a:pPr algn="ctr"/>
+            <a:endParaRPr/>
           </a:p>
         </p:txBody>
       </p:sp>
@@ -3729,6 +3739,7 @@
           <a:lstStyle/>
           <a:p>
             <a:pPr algn="ctr"/>
+            <a:endParaRPr/>
           </a:p>
         </p:txBody>
       </p:sp>
@@ -3773,6 +3784,7 @@
           <a:lstStyle/>
           <a:p>
             <a:pPr algn="ctr"/>
+            <a:endParaRPr/>
           </a:p>
         </p:txBody>
       </p:sp>
@@ -3817,6 +3829,7 @@
           <a:lstStyle/>
           <a:p>
             <a:pPr algn="ctr"/>
+            <a:endParaRPr/>
           </a:p>
         </p:txBody>
       </p:sp>
@@ -3861,6 +3874,7 @@
           <a:lstStyle/>
           <a:p>
             <a:pPr algn="ctr"/>
+            <a:endParaRPr/>
           </a:p>
         </p:txBody>
       </p:sp>
@@ -3905,6 +3919,7 @@
           <a:lstStyle/>
           <a:p>
             <a:pPr algn="ctr"/>
+            <a:endParaRPr/>
           </a:p>
         </p:txBody>
       </p:sp>
@@ -3949,6 +3964,7 @@
           <a:lstStyle/>
           <a:p>
             <a:pPr algn="ctr"/>
+            <a:endParaRPr/>
           </a:p>
         </p:txBody>
       </p:sp>
@@ -3993,6 +4009,7 @@
           <a:lstStyle/>
           <a:p>
             <a:pPr algn="ctr"/>
+            <a:endParaRPr/>
           </a:p>
         </p:txBody>
       </p:sp>
@@ -4037,6 +4054,7 @@
           <a:lstStyle/>
           <a:p>
             <a:pPr algn="ctr"/>
+            <a:endParaRPr/>
           </a:p>
         </p:txBody>
       </p:sp>
@@ -4057,7 +4075,7 @@
           <a:noFill/>
         </p:spPr>
         <p:txBody>
-          <a:bodyPr wrap="square" anchor="t" lIns="0" rIns="0" tIns="0" bIns="0">
+          <a:bodyPr wrap="square" lIns="0" tIns="0" rIns="0" bIns="0" anchor="t">
             <a:spAutoFit/>
           </a:bodyPr>
           <a:lstStyle/>
@@ -4093,7 +4111,7 @@
 </file>
 
 <file path=ppt/slides/slide10.xml><?xml version="1.0" encoding="utf-8"?>
-<p:sld xmlns:a="http://schemas.openxmlformats.org/drawingml/2006/main" xmlns:p="http://schemas.openxmlformats.org/presentationml/2006/main" xmlns:r="http://schemas.openxmlformats.org/officeDocument/2006/relationships">
+<p:sld xmlns:a="http://schemas.openxmlformats.org/drawingml/2006/main" xmlns:r="http://schemas.openxmlformats.org/officeDocument/2006/relationships" xmlns:p="http://schemas.openxmlformats.org/presentationml/2006/main">
   <p:cSld>
     <p:spTree>
       <p:nvGrpSpPr>
@@ -4101,7 +4119,14 @@
         <p:cNvGrpSpPr/>
         <p:nvPr/>
       </p:nvGrpSpPr>
-      <p:grpSpPr/>
+      <p:grpSpPr>
+        <a:xfrm>
+          <a:off x="0" y="0"/>
+          <a:ext cx="0" cy="0"/>
+          <a:chOff x="0" y="0"/>
+          <a:chExt cx="0" cy="0"/>
+        </a:xfrm>
+      </p:grpSpPr>
       <p:sp>
         <p:nvSpPr>
           <p:cNvPr id="2" name="Rectangle 1"/>
@@ -4143,6 +4168,7 @@
           <a:lstStyle/>
           <a:p>
             <a:pPr algn="ctr"/>
+            <a:endParaRPr/>
           </a:p>
         </p:txBody>
       </p:sp>
@@ -4163,7 +4189,7 @@
           <a:noFill/>
         </p:spPr>
         <p:txBody>
-          <a:bodyPr wrap="square" anchor="t" lIns="0" rIns="0" tIns="0" bIns="0">
+          <a:bodyPr wrap="square" lIns="0" tIns="0" rIns="0" bIns="0" anchor="t">
             <a:spAutoFit/>
           </a:bodyPr>
           <a:lstStyle/>
@@ -4198,7 +4224,7 @@
           <a:noFill/>
         </p:spPr>
         <p:txBody>
-          <a:bodyPr wrap="square" anchor="t" lIns="0" rIns="0" tIns="0" bIns="0">
+          <a:bodyPr wrap="square" lIns="0" tIns="0" rIns="0" bIns="0" anchor="t">
             <a:spAutoFit/>
           </a:bodyPr>
           <a:lstStyle/>
@@ -4237,7 +4263,7 @@
           <a:noFill/>
         </p:spPr>
         <p:txBody>
-          <a:bodyPr wrap="square" anchor="t" lIns="0" rIns="0" tIns="0" bIns="0">
+          <a:bodyPr wrap="square" lIns="0" tIns="0" rIns="0" bIns="0" anchor="t">
             <a:spAutoFit/>
           </a:bodyPr>
           <a:lstStyle/>
@@ -4302,6 +4328,7 @@
           <a:lstStyle/>
           <a:p>
             <a:pPr algn="ctr"/>
+            <a:endParaRPr/>
           </a:p>
         </p:txBody>
       </p:sp>
@@ -4322,7 +4349,7 @@
           <a:noFill/>
         </p:spPr>
         <p:txBody>
-          <a:bodyPr wrap="square" anchor="t" lIns="0" rIns="0" tIns="0" bIns="0">
+          <a:bodyPr wrap="square" lIns="0" tIns="0" rIns="0" bIns="0" anchor="t">
             <a:spAutoFit/>
           </a:bodyPr>
           <a:lstStyle/>
@@ -4418,6 +4445,7 @@
           <a:lstStyle/>
           <a:p>
             <a:pPr algn="ctr"/>
+            <a:endParaRPr/>
           </a:p>
         </p:txBody>
       </p:sp>
@@ -4438,7 +4466,7 @@
           <a:noFill/>
         </p:spPr>
         <p:txBody>
-          <a:bodyPr wrap="square" anchor="t" lIns="0" rIns="0" tIns="0" bIns="0">
+          <a:bodyPr wrap="square" lIns="0" tIns="0" rIns="0" bIns="0" anchor="t">
             <a:spAutoFit/>
           </a:bodyPr>
           <a:lstStyle/>
@@ -4534,6 +4562,7 @@
           <a:lstStyle/>
           <a:p>
             <a:pPr algn="ctr"/>
+            <a:endParaRPr/>
           </a:p>
         </p:txBody>
       </p:sp>
@@ -4554,7 +4583,7 @@
           <a:noFill/>
         </p:spPr>
         <p:txBody>
-          <a:bodyPr wrap="square" anchor="t" lIns="0" rIns="0" tIns="0" bIns="0">
+          <a:bodyPr wrap="square" lIns="0" tIns="0" rIns="0" bIns="0" anchor="t">
             <a:spAutoFit/>
           </a:bodyPr>
           <a:lstStyle/>
@@ -4624,7 +4653,7 @@
           <a:noFill/>
         </p:spPr>
         <p:txBody>
-          <a:bodyPr wrap="square" anchor="t" lIns="0" rIns="0" tIns="0" bIns="0">
+          <a:bodyPr wrap="square" lIns="0" tIns="0" rIns="0" bIns="0" anchor="t">
             <a:spAutoFit/>
           </a:bodyPr>
           <a:lstStyle/>
@@ -4679,7 +4708,7 @@
 </file>
 
 <file path=ppt/slides/slide11.xml><?xml version="1.0" encoding="utf-8"?>
-<p:sld xmlns:a="http://schemas.openxmlformats.org/drawingml/2006/main" xmlns:p="http://schemas.openxmlformats.org/presentationml/2006/main" xmlns:r="http://schemas.openxmlformats.org/officeDocument/2006/relationships">
+<p:sld xmlns:a="http://schemas.openxmlformats.org/drawingml/2006/main" xmlns:r="http://schemas.openxmlformats.org/officeDocument/2006/relationships" xmlns:p="http://schemas.openxmlformats.org/presentationml/2006/main">
   <p:cSld>
     <p:spTree>
       <p:nvGrpSpPr>
@@ -4687,7 +4716,14 @@
         <p:cNvGrpSpPr/>
         <p:nvPr/>
       </p:nvGrpSpPr>
-      <p:grpSpPr/>
+      <p:grpSpPr>
+        <a:xfrm>
+          <a:off x="0" y="0"/>
+          <a:ext cx="0" cy="0"/>
+          <a:chOff x="0" y="0"/>
+          <a:chExt cx="0" cy="0"/>
+        </a:xfrm>
+      </p:grpSpPr>
       <p:sp>
         <p:nvSpPr>
           <p:cNvPr id="2" name="Rectangle 1"/>
@@ -4729,6 +4765,7 @@
           <a:lstStyle/>
           <a:p>
             <a:pPr algn="ctr"/>
+            <a:endParaRPr/>
           </a:p>
         </p:txBody>
       </p:sp>
@@ -4749,7 +4786,7 @@
           <a:noFill/>
         </p:spPr>
         <p:txBody>
-          <a:bodyPr wrap="square" anchor="t" lIns="0" rIns="0" tIns="0" bIns="0">
+          <a:bodyPr wrap="square" lIns="0" tIns="0" rIns="0" bIns="0" anchor="t">
             <a:spAutoFit/>
           </a:bodyPr>
           <a:lstStyle/>
@@ -4784,7 +4821,7 @@
           <a:noFill/>
         </p:spPr>
         <p:txBody>
-          <a:bodyPr wrap="square" anchor="t" lIns="0" rIns="0" tIns="0" bIns="0">
+          <a:bodyPr wrap="square" lIns="0" tIns="0" rIns="0" bIns="0" anchor="t">
             <a:spAutoFit/>
           </a:bodyPr>
           <a:lstStyle/>
@@ -4823,7 +4860,7 @@
           <a:noFill/>
         </p:spPr>
         <p:txBody>
-          <a:bodyPr wrap="square" anchor="t" lIns="0" rIns="0" tIns="0" bIns="0">
+          <a:bodyPr wrap="square" lIns="0" tIns="0" rIns="0" bIns="0" anchor="t">
             <a:spAutoFit/>
           </a:bodyPr>
           <a:lstStyle/>
@@ -4890,6 +4927,7 @@
           <a:lstStyle/>
           <a:p>
             <a:pPr algn="ctr"/>
+            <a:endParaRPr/>
           </a:p>
         </p:txBody>
       </p:sp>
@@ -4910,7 +4948,7 @@
           <a:noFill/>
         </p:spPr>
         <p:txBody>
-          <a:bodyPr wrap="square" anchor="ctr" lIns="0" rIns="0" tIns="0" bIns="0">
+          <a:bodyPr wrap="square" lIns="0" tIns="0" rIns="0" bIns="0" anchor="ctr">
             <a:spAutoFit/>
           </a:bodyPr>
           <a:lstStyle/>
@@ -4973,6 +5011,7 @@
           <a:lstStyle/>
           <a:p>
             <a:pPr algn="ctr"/>
+            <a:endParaRPr/>
           </a:p>
         </p:txBody>
       </p:sp>
@@ -4993,7 +5032,7 @@
           <a:noFill/>
         </p:spPr>
         <p:txBody>
-          <a:bodyPr wrap="square" anchor="ctr" lIns="0" rIns="0" tIns="0" bIns="0">
+          <a:bodyPr wrap="square" lIns="0" tIns="0" rIns="0" bIns="0" anchor="ctr">
             <a:spAutoFit/>
           </a:bodyPr>
           <a:lstStyle/>
@@ -5056,6 +5095,7 @@
           <a:lstStyle/>
           <a:p>
             <a:pPr algn="ctr"/>
+            <a:endParaRPr/>
           </a:p>
         </p:txBody>
       </p:sp>
@@ -5076,7 +5116,7 @@
           <a:noFill/>
         </p:spPr>
         <p:txBody>
-          <a:bodyPr wrap="square" anchor="ctr" lIns="0" rIns="0" tIns="0" bIns="0">
+          <a:bodyPr wrap="square" lIns="0" tIns="0" rIns="0" bIns="0" anchor="ctr">
             <a:spAutoFit/>
           </a:bodyPr>
           <a:lstStyle/>
@@ -5139,6 +5179,7 @@
           <a:lstStyle/>
           <a:p>
             <a:pPr algn="ctr"/>
+            <a:endParaRPr/>
           </a:p>
         </p:txBody>
       </p:sp>
@@ -5159,7 +5200,7 @@
           <a:noFill/>
         </p:spPr>
         <p:txBody>
-          <a:bodyPr wrap="square" anchor="ctr" lIns="0" rIns="0" tIns="0" bIns="0">
+          <a:bodyPr wrap="square" lIns="0" tIns="0" rIns="0" bIns="0" anchor="ctr">
             <a:spAutoFit/>
           </a:bodyPr>
           <a:lstStyle/>
@@ -5186,7 +5227,7 @@
 </file>
 
 <file path=ppt/slides/slide12.xml><?xml version="1.0" encoding="utf-8"?>
-<p:sld xmlns:a="http://schemas.openxmlformats.org/drawingml/2006/main" xmlns:p="http://schemas.openxmlformats.org/presentationml/2006/main" xmlns:r="http://schemas.openxmlformats.org/officeDocument/2006/relationships">
+<p:sld xmlns:a="http://schemas.openxmlformats.org/drawingml/2006/main" xmlns:r="http://schemas.openxmlformats.org/officeDocument/2006/relationships" xmlns:p="http://schemas.openxmlformats.org/presentationml/2006/main">
   <p:cSld>
     <p:spTree>
       <p:nvGrpSpPr>
@@ -5194,7 +5235,14 @@
         <p:cNvGrpSpPr/>
         <p:nvPr/>
       </p:nvGrpSpPr>
-      <p:grpSpPr/>
+      <p:grpSpPr>
+        <a:xfrm>
+          <a:off x="0" y="0"/>
+          <a:ext cx="0" cy="0"/>
+          <a:chOff x="0" y="0"/>
+          <a:chExt cx="0" cy="0"/>
+        </a:xfrm>
+      </p:grpSpPr>
       <p:sp>
         <p:nvSpPr>
           <p:cNvPr id="2" name="Rectangle 1"/>
@@ -5236,6 +5284,7 @@
           <a:lstStyle/>
           <a:p>
             <a:pPr algn="ctr"/>
+            <a:endParaRPr/>
           </a:p>
         </p:txBody>
       </p:sp>
@@ -5280,6 +5329,7 @@
           <a:lstStyle/>
           <a:p>
             <a:pPr algn="ctr"/>
+            <a:endParaRPr/>
           </a:p>
         </p:txBody>
       </p:sp>
@@ -5324,6 +5374,7 @@
           <a:lstStyle/>
           <a:p>
             <a:pPr algn="ctr"/>
+            <a:endParaRPr/>
           </a:p>
         </p:txBody>
       </p:sp>
@@ -5370,6 +5421,7 @@
           <a:lstStyle/>
           <a:p>
             <a:pPr algn="ctr"/>
+            <a:endParaRPr/>
           </a:p>
         </p:txBody>
       </p:sp>
@@ -5381,7 +5433,7 @@
         </p:nvSpPr>
         <p:spPr>
           <a:xfrm>
-            <a:off x="822960" y="995680"/>
+            <a:off x="911860" y="995680"/>
             <a:ext cx="101600" cy="101600"/>
           </a:xfrm>
           <a:custGeom>
@@ -5432,6 +5484,7 @@
           <a:lstStyle/>
           <a:p>
             <a:pPr algn="ctr"/>
+            <a:endParaRPr/>
           </a:p>
         </p:txBody>
       </p:sp>
@@ -5476,6 +5529,7 @@
           <a:lstStyle/>
           <a:p>
             <a:pPr algn="ctr"/>
+            <a:endParaRPr/>
           </a:p>
         </p:txBody>
       </p:sp>
@@ -5520,6 +5574,7 @@
           <a:lstStyle/>
           <a:p>
             <a:pPr algn="ctr"/>
+            <a:endParaRPr/>
           </a:p>
         </p:txBody>
       </p:sp>
@@ -5540,7 +5595,7 @@
           <a:noFill/>
         </p:spPr>
         <p:txBody>
-          <a:bodyPr wrap="square" anchor="t" lIns="0" rIns="0" tIns="0" bIns="0">
+          <a:bodyPr wrap="square" lIns="0" tIns="0" rIns="0" bIns="0" anchor="t">
             <a:spAutoFit/>
           </a:bodyPr>
           <a:lstStyle/>
@@ -5584,7 +5639,7 @@
           <a:noFill/>
         </p:spPr>
         <p:txBody>
-          <a:bodyPr wrap="square" anchor="t" lIns="0" rIns="0" tIns="0" bIns="0">
+          <a:bodyPr wrap="square" lIns="0" tIns="0" rIns="0" bIns="0" anchor="t">
             <a:spAutoFit/>
           </a:bodyPr>
           <a:lstStyle/>
@@ -5658,6 +5713,7 @@
           <a:lstStyle/>
           <a:p>
             <a:pPr algn="ctr"/>
+            <a:endParaRPr/>
           </a:p>
         </p:txBody>
       </p:sp>
@@ -5678,7 +5734,7 @@
           <a:noFill/>
         </p:spPr>
         <p:txBody>
-          <a:bodyPr wrap="square" anchor="ctr" lIns="0" rIns="0" tIns="0" bIns="0">
+          <a:bodyPr wrap="square" lIns="0" tIns="0" rIns="0" bIns="0" anchor="ctr">
             <a:spAutoFit/>
           </a:bodyPr>
           <a:lstStyle/>
@@ -5714,7 +5770,7 @@
           <a:noFill/>
         </p:spPr>
         <p:txBody>
-          <a:bodyPr wrap="square" anchor="ctr" lIns="0" rIns="0" tIns="0" bIns="0">
+          <a:bodyPr wrap="square" lIns="0" tIns="0" rIns="0" bIns="0" anchor="ctr">
             <a:spAutoFit/>
           </a:bodyPr>
           <a:lstStyle/>
@@ -5750,7 +5806,7 @@
           <a:noFill/>
         </p:spPr>
         <p:txBody>
-          <a:bodyPr wrap="square" anchor="t" lIns="0" rIns="0" tIns="0" bIns="0">
+          <a:bodyPr wrap="square" lIns="0" tIns="0" rIns="0" bIns="0" anchor="t">
             <a:spAutoFit/>
           </a:bodyPr>
           <a:lstStyle/>
@@ -5777,7 +5833,7 @@
 </file>
 
 <file path=ppt/slides/slide2.xml><?xml version="1.0" encoding="utf-8"?>
-<p:sld xmlns:a="http://schemas.openxmlformats.org/drawingml/2006/main" xmlns:p="http://schemas.openxmlformats.org/presentationml/2006/main" xmlns:r="http://schemas.openxmlformats.org/officeDocument/2006/relationships">
+<p:sld xmlns:a="http://schemas.openxmlformats.org/drawingml/2006/main" xmlns:r="http://schemas.openxmlformats.org/officeDocument/2006/relationships" xmlns:p="http://schemas.openxmlformats.org/presentationml/2006/main">
   <p:cSld>
     <p:spTree>
       <p:nvGrpSpPr>
@@ -5785,7 +5841,14 @@
         <p:cNvGrpSpPr/>
         <p:nvPr/>
       </p:nvGrpSpPr>
-      <p:grpSpPr/>
+      <p:grpSpPr>
+        <a:xfrm>
+          <a:off x="0" y="0"/>
+          <a:ext cx="0" cy="0"/>
+          <a:chOff x="0" y="0"/>
+          <a:chExt cx="0" cy="0"/>
+        </a:xfrm>
+      </p:grpSpPr>
       <p:sp>
         <p:nvSpPr>
           <p:cNvPr id="2" name="Rectangle 1"/>
@@ -5827,6 +5890,7 @@
           <a:lstStyle/>
           <a:p>
             <a:pPr algn="ctr"/>
+            <a:endParaRPr/>
           </a:p>
         </p:txBody>
       </p:sp>
@@ -5847,7 +5911,7 @@
           <a:noFill/>
         </p:spPr>
         <p:txBody>
-          <a:bodyPr wrap="square" anchor="t" lIns="0" rIns="0" tIns="0" bIns="0">
+          <a:bodyPr wrap="square" lIns="0" tIns="0" rIns="0" bIns="0" anchor="t">
             <a:spAutoFit/>
           </a:bodyPr>
           <a:lstStyle/>
@@ -5882,7 +5946,7 @@
           <a:noFill/>
         </p:spPr>
         <p:txBody>
-          <a:bodyPr wrap="square" anchor="t" lIns="0" rIns="0" tIns="0" bIns="0">
+          <a:bodyPr wrap="square" lIns="0" tIns="0" rIns="0" bIns="0" anchor="t">
             <a:spAutoFit/>
           </a:bodyPr>
           <a:lstStyle/>
@@ -5937,7 +6001,7 @@
           <a:noFill/>
         </p:spPr>
         <p:txBody>
-          <a:bodyPr wrap="square" anchor="t" lIns="0" rIns="0" tIns="0" bIns="0">
+          <a:bodyPr wrap="square" lIns="0" tIns="0" rIns="0" bIns="0" anchor="t">
             <a:spAutoFit/>
           </a:bodyPr>
           <a:lstStyle/>
@@ -6002,6 +6066,7 @@
           <a:lstStyle/>
           <a:p>
             <a:pPr algn="ctr"/>
+            <a:endParaRPr/>
           </a:p>
         </p:txBody>
       </p:sp>
@@ -6022,7 +6087,7 @@
           <a:noFill/>
         </p:spPr>
         <p:txBody>
-          <a:bodyPr wrap="square" anchor="t" lIns="0" rIns="0" tIns="0" bIns="0">
+          <a:bodyPr wrap="square" lIns="0" tIns="0" rIns="0" bIns="0" anchor="t">
             <a:spAutoFit/>
           </a:bodyPr>
           <a:lstStyle/>
@@ -6118,6 +6183,7 @@
           <a:lstStyle/>
           <a:p>
             <a:pPr algn="ctr"/>
+            <a:endParaRPr/>
           </a:p>
         </p:txBody>
       </p:sp>
@@ -6138,7 +6204,7 @@
           <a:noFill/>
         </p:spPr>
         <p:txBody>
-          <a:bodyPr wrap="square" anchor="t" lIns="0" rIns="0" tIns="0" bIns="0">
+          <a:bodyPr wrap="square" lIns="0" tIns="0" rIns="0" bIns="0" anchor="t">
             <a:spAutoFit/>
           </a:bodyPr>
           <a:lstStyle/>
@@ -6234,6 +6300,7 @@
           <a:lstStyle/>
           <a:p>
             <a:pPr algn="ctr"/>
+            <a:endParaRPr/>
           </a:p>
         </p:txBody>
       </p:sp>
@@ -6254,7 +6321,7 @@
           <a:noFill/>
         </p:spPr>
         <p:txBody>
-          <a:bodyPr wrap="square" anchor="t" lIns="0" rIns="0" tIns="0" bIns="0">
+          <a:bodyPr wrap="square" lIns="0" tIns="0" rIns="0" bIns="0" anchor="t">
             <a:spAutoFit/>
           </a:bodyPr>
           <a:lstStyle/>
@@ -6308,7 +6375,7 @@
           <a:noFill/>
         </p:spPr>
         <p:txBody>
-          <a:bodyPr wrap="square" anchor="t" lIns="0" rIns="0" tIns="0" bIns="0">
+          <a:bodyPr wrap="square" lIns="0" tIns="0" rIns="0" bIns="0" anchor="t">
             <a:spAutoFit/>
           </a:bodyPr>
           <a:lstStyle/>
@@ -6343,7 +6410,7 @@
           <a:noFill/>
         </p:spPr>
         <p:txBody>
-          <a:bodyPr wrap="square" anchor="t" lIns="0" rIns="0" tIns="0" bIns="0">
+          <a:bodyPr wrap="square" lIns="0" tIns="0" rIns="0" bIns="0" anchor="t">
             <a:spAutoFit/>
           </a:bodyPr>
           <a:lstStyle/>
@@ -6379,7 +6446,7 @@
 </file>
 
 <file path=ppt/slides/slide3.xml><?xml version="1.0" encoding="utf-8"?>
-<p:sld xmlns:a="http://schemas.openxmlformats.org/drawingml/2006/main" xmlns:p="http://schemas.openxmlformats.org/presentationml/2006/main" xmlns:r="http://schemas.openxmlformats.org/officeDocument/2006/relationships">
+<p:sld xmlns:a="http://schemas.openxmlformats.org/drawingml/2006/main" xmlns:r="http://schemas.openxmlformats.org/officeDocument/2006/relationships" xmlns:p="http://schemas.openxmlformats.org/presentationml/2006/main">
   <p:cSld>
     <p:spTree>
       <p:nvGrpSpPr>
@@ -6387,7 +6454,14 @@
         <p:cNvGrpSpPr/>
         <p:nvPr/>
       </p:nvGrpSpPr>
-      <p:grpSpPr/>
+      <p:grpSpPr>
+        <a:xfrm>
+          <a:off x="0" y="0"/>
+          <a:ext cx="0" cy="0"/>
+          <a:chOff x="0" y="0"/>
+          <a:chExt cx="0" cy="0"/>
+        </a:xfrm>
+      </p:grpSpPr>
       <p:sp>
         <p:nvSpPr>
           <p:cNvPr id="2" name="Rectangle 1"/>
@@ -6429,6 +6503,7 @@
           <a:lstStyle/>
           <a:p>
             <a:pPr algn="ctr"/>
+            <a:endParaRPr/>
           </a:p>
         </p:txBody>
       </p:sp>
@@ -6449,7 +6524,7 @@
           <a:noFill/>
         </p:spPr>
         <p:txBody>
-          <a:bodyPr wrap="square" anchor="t" lIns="0" rIns="0" tIns="0" bIns="0">
+          <a:bodyPr wrap="square" lIns="0" tIns="0" rIns="0" bIns="0" anchor="t">
             <a:spAutoFit/>
           </a:bodyPr>
           <a:lstStyle/>
@@ -6484,7 +6559,7 @@
           <a:noFill/>
         </p:spPr>
         <p:txBody>
-          <a:bodyPr wrap="square" anchor="t" lIns="0" rIns="0" tIns="0" bIns="0">
+          <a:bodyPr wrap="square" lIns="0" tIns="0" rIns="0" bIns="0" anchor="t">
             <a:spAutoFit/>
           </a:bodyPr>
           <a:lstStyle/>
@@ -6543,6 +6618,7 @@
           <a:lstStyle/>
           <a:p>
             <a:pPr algn="ctr"/>
+            <a:endParaRPr/>
           </a:p>
         </p:txBody>
       </p:sp>
@@ -6563,7 +6639,7 @@
           <a:noFill/>
         </p:spPr>
         <p:txBody>
-          <a:bodyPr wrap="square" anchor="t" lIns="0" rIns="0" tIns="0" bIns="0">
+          <a:bodyPr wrap="square" lIns="0" tIns="0" rIns="0" bIns="0" anchor="t">
             <a:spAutoFit/>
           </a:bodyPr>
           <a:lstStyle/>
@@ -6598,7 +6674,7 @@
           <a:noFill/>
         </p:spPr>
         <p:txBody>
-          <a:bodyPr wrap="square" anchor="t" lIns="0" rIns="0" tIns="0" bIns="0">
+          <a:bodyPr wrap="square" lIns="0" tIns="0" rIns="0" bIns="0" anchor="t">
             <a:spAutoFit/>
           </a:bodyPr>
           <a:lstStyle/>
@@ -6683,6 +6759,7 @@
           <a:lstStyle/>
           <a:p>
             <a:pPr algn="ctr"/>
+            <a:endParaRPr/>
           </a:p>
         </p:txBody>
       </p:sp>
@@ -6703,7 +6780,7 @@
           <a:noFill/>
         </p:spPr>
         <p:txBody>
-          <a:bodyPr wrap="square" anchor="t" lIns="0" rIns="0" tIns="0" bIns="0">
+          <a:bodyPr wrap="square" lIns="0" tIns="0" rIns="0" bIns="0" anchor="t">
             <a:spAutoFit/>
           </a:bodyPr>
           <a:lstStyle/>
@@ -6738,7 +6815,7 @@
           <a:noFill/>
         </p:spPr>
         <p:txBody>
-          <a:bodyPr wrap="square" anchor="t" lIns="0" rIns="0" tIns="0" bIns="0">
+          <a:bodyPr wrap="square" lIns="0" tIns="0" rIns="0" bIns="0" anchor="t">
             <a:spAutoFit/>
           </a:bodyPr>
           <a:lstStyle/>
@@ -6799,7 +6876,7 @@
           <a:noFill/>
         </p:spPr>
         <p:txBody>
-          <a:bodyPr wrap="square" anchor="t" lIns="0" rIns="0" tIns="0" bIns="0">
+          <a:bodyPr wrap="square" lIns="0" tIns="0" rIns="0" bIns="0" anchor="t">
             <a:spAutoFit/>
           </a:bodyPr>
           <a:lstStyle/>
@@ -6835,7 +6912,7 @@
 </file>
 
 <file path=ppt/slides/slide4.xml><?xml version="1.0" encoding="utf-8"?>
-<p:sld xmlns:a="http://schemas.openxmlformats.org/drawingml/2006/main" xmlns:p="http://schemas.openxmlformats.org/presentationml/2006/main" xmlns:r="http://schemas.openxmlformats.org/officeDocument/2006/relationships">
+<p:sld xmlns:a="http://schemas.openxmlformats.org/drawingml/2006/main" xmlns:r="http://schemas.openxmlformats.org/officeDocument/2006/relationships" xmlns:p="http://schemas.openxmlformats.org/presentationml/2006/main">
   <p:cSld>
     <p:spTree>
       <p:nvGrpSpPr>
@@ -6843,7 +6920,14 @@
         <p:cNvGrpSpPr/>
         <p:nvPr/>
       </p:nvGrpSpPr>
-      <p:grpSpPr/>
+      <p:grpSpPr>
+        <a:xfrm>
+          <a:off x="0" y="0"/>
+          <a:ext cx="0" cy="0"/>
+          <a:chOff x="0" y="0"/>
+          <a:chExt cx="0" cy="0"/>
+        </a:xfrm>
+      </p:grpSpPr>
       <p:sp>
         <p:nvSpPr>
           <p:cNvPr id="2" name="Rectangle 1"/>
@@ -6885,6 +6969,7 @@
           <a:lstStyle/>
           <a:p>
             <a:pPr algn="ctr"/>
+            <a:endParaRPr/>
           </a:p>
         </p:txBody>
       </p:sp>
@@ -6905,7 +6990,7 @@
           <a:noFill/>
         </p:spPr>
         <p:txBody>
-          <a:bodyPr wrap="square" anchor="t" lIns="0" rIns="0" tIns="0" bIns="0">
+          <a:bodyPr wrap="square" lIns="0" tIns="0" rIns="0" bIns="0" anchor="t">
             <a:spAutoFit/>
           </a:bodyPr>
           <a:lstStyle/>
@@ -6940,7 +7025,7 @@
           <a:noFill/>
         </p:spPr>
         <p:txBody>
-          <a:bodyPr wrap="square" anchor="t" lIns="0" rIns="0" tIns="0" bIns="0">
+          <a:bodyPr wrap="square" lIns="0" tIns="0" rIns="0" bIns="0" anchor="t">
             <a:spAutoFit/>
           </a:bodyPr>
           <a:lstStyle/>
@@ -6979,7 +7064,7 @@
           <a:noFill/>
         </p:spPr>
         <p:txBody>
-          <a:bodyPr wrap="square" anchor="t" lIns="0" rIns="0" tIns="0" bIns="0">
+          <a:bodyPr wrap="square" lIns="0" tIns="0" rIns="0" bIns="0" anchor="t">
             <a:spAutoFit/>
           </a:bodyPr>
           <a:lstStyle/>
@@ -7029,7 +7114,7 @@
 </file>
 
 <file path=ppt/slides/slide5.xml><?xml version="1.0" encoding="utf-8"?>
-<p:sld xmlns:a="http://schemas.openxmlformats.org/drawingml/2006/main" xmlns:p="http://schemas.openxmlformats.org/presentationml/2006/main" xmlns:r="http://schemas.openxmlformats.org/officeDocument/2006/relationships">
+<p:sld xmlns:a="http://schemas.openxmlformats.org/drawingml/2006/main" xmlns:r="http://schemas.openxmlformats.org/officeDocument/2006/relationships" xmlns:p="http://schemas.openxmlformats.org/presentationml/2006/main">
   <p:cSld>
     <p:spTree>
       <p:nvGrpSpPr>
@@ -7037,7 +7122,14 @@
         <p:cNvGrpSpPr/>
         <p:nvPr/>
       </p:nvGrpSpPr>
-      <p:grpSpPr/>
+      <p:grpSpPr>
+        <a:xfrm>
+          <a:off x="0" y="0"/>
+          <a:ext cx="0" cy="0"/>
+          <a:chOff x="0" y="0"/>
+          <a:chExt cx="0" cy="0"/>
+        </a:xfrm>
+      </p:grpSpPr>
       <p:sp>
         <p:nvSpPr>
           <p:cNvPr id="2" name="Rectangle 1"/>
@@ -7079,6 +7171,7 @@
           <a:lstStyle/>
           <a:p>
             <a:pPr algn="ctr"/>
+            <a:endParaRPr/>
           </a:p>
         </p:txBody>
       </p:sp>
@@ -7099,7 +7192,7 @@
           <a:noFill/>
         </p:spPr>
         <p:txBody>
-          <a:bodyPr wrap="square" anchor="t" lIns="0" rIns="0" tIns="0" bIns="0">
+          <a:bodyPr wrap="square" lIns="0" tIns="0" rIns="0" bIns="0" anchor="t">
             <a:spAutoFit/>
           </a:bodyPr>
           <a:lstStyle/>
@@ -7134,7 +7227,7 @@
           <a:noFill/>
         </p:spPr>
         <p:txBody>
-          <a:bodyPr wrap="square" anchor="t" lIns="0" rIns="0" tIns="0" bIns="0">
+          <a:bodyPr wrap="square" lIns="0" tIns="0" rIns="0" bIns="0" anchor="t">
             <a:spAutoFit/>
           </a:bodyPr>
           <a:lstStyle/>
@@ -7173,7 +7266,7 @@
           <a:noFill/>
         </p:spPr>
         <p:txBody>
-          <a:bodyPr wrap="square" anchor="t" lIns="0" rIns="0" tIns="0" bIns="0">
+          <a:bodyPr wrap="square" lIns="0" tIns="0" rIns="0" bIns="0" anchor="t">
             <a:spAutoFit/>
           </a:bodyPr>
           <a:lstStyle/>
@@ -7238,6 +7331,7 @@
           <a:lstStyle/>
           <a:p>
             <a:pPr algn="ctr"/>
+            <a:endParaRPr/>
           </a:p>
         </p:txBody>
       </p:sp>
@@ -7282,6 +7376,7 @@
           <a:lstStyle/>
           <a:p>
             <a:pPr algn="ctr"/>
+            <a:endParaRPr/>
           </a:p>
         </p:txBody>
       </p:sp>
@@ -7302,7 +7397,7 @@
           <a:noFill/>
         </p:spPr>
         <p:txBody>
-          <a:bodyPr wrap="square" anchor="t" lIns="0" rIns="0" tIns="0" bIns="0">
+          <a:bodyPr wrap="square" lIns="0" tIns="0" rIns="0" bIns="0" anchor="t">
             <a:spAutoFit/>
           </a:bodyPr>
           <a:lstStyle/>
@@ -7400,6 +7495,7 @@
           <a:lstStyle/>
           <a:p>
             <a:pPr algn="ctr"/>
+            <a:endParaRPr/>
           </a:p>
         </p:txBody>
       </p:sp>
@@ -7444,6 +7540,7 @@
           <a:lstStyle/>
           <a:p>
             <a:pPr algn="ctr"/>
+            <a:endParaRPr/>
           </a:p>
         </p:txBody>
       </p:sp>
@@ -7464,7 +7561,7 @@
           <a:noFill/>
         </p:spPr>
         <p:txBody>
-          <a:bodyPr wrap="square" anchor="t" lIns="0" rIns="0" tIns="0" bIns="0">
+          <a:bodyPr wrap="square" lIns="0" tIns="0" rIns="0" bIns="0" anchor="t">
             <a:spAutoFit/>
           </a:bodyPr>
           <a:lstStyle/>
@@ -7562,6 +7659,7 @@
           <a:lstStyle/>
           <a:p>
             <a:pPr algn="ctr"/>
+            <a:endParaRPr/>
           </a:p>
         </p:txBody>
       </p:sp>
@@ -7606,6 +7704,7 @@
           <a:lstStyle/>
           <a:p>
             <a:pPr algn="ctr"/>
+            <a:endParaRPr/>
           </a:p>
         </p:txBody>
       </p:sp>
@@ -7626,7 +7725,7 @@
           <a:noFill/>
         </p:spPr>
         <p:txBody>
-          <a:bodyPr wrap="square" anchor="t" lIns="0" rIns="0" tIns="0" bIns="0">
+          <a:bodyPr wrap="square" lIns="0" tIns="0" rIns="0" bIns="0" anchor="t">
             <a:spAutoFit/>
           </a:bodyPr>
           <a:lstStyle/>
@@ -7690,7 +7789,7 @@
 </file>
 
 <file path=ppt/slides/slide6.xml><?xml version="1.0" encoding="utf-8"?>
-<p:sld xmlns:a="http://schemas.openxmlformats.org/drawingml/2006/main" xmlns:p="http://schemas.openxmlformats.org/presentationml/2006/main" xmlns:r="http://schemas.openxmlformats.org/officeDocument/2006/relationships">
+<p:sld xmlns:a="http://schemas.openxmlformats.org/drawingml/2006/main" xmlns:r="http://schemas.openxmlformats.org/officeDocument/2006/relationships" xmlns:p="http://schemas.openxmlformats.org/presentationml/2006/main">
   <p:cSld>
     <p:spTree>
       <p:nvGrpSpPr>
@@ -7698,7 +7797,14 @@
         <p:cNvGrpSpPr/>
         <p:nvPr/>
       </p:nvGrpSpPr>
-      <p:grpSpPr/>
+      <p:grpSpPr>
+        <a:xfrm>
+          <a:off x="0" y="0"/>
+          <a:ext cx="0" cy="0"/>
+          <a:chOff x="0" y="0"/>
+          <a:chExt cx="0" cy="0"/>
+        </a:xfrm>
+      </p:grpSpPr>
       <p:sp>
         <p:nvSpPr>
           <p:cNvPr id="2" name="Rectangle 1"/>
@@ -7740,6 +7846,7 @@
           <a:lstStyle/>
           <a:p>
             <a:pPr algn="ctr"/>
+            <a:endParaRPr/>
           </a:p>
         </p:txBody>
       </p:sp>
@@ -7760,7 +7867,7 @@
           <a:noFill/>
         </p:spPr>
         <p:txBody>
-          <a:bodyPr wrap="square" anchor="t" lIns="0" rIns="0" tIns="0" bIns="0">
+          <a:bodyPr wrap="square" lIns="0" tIns="0" rIns="0" bIns="0" anchor="t">
             <a:spAutoFit/>
           </a:bodyPr>
           <a:lstStyle/>
@@ -7795,7 +7902,7 @@
           <a:noFill/>
         </p:spPr>
         <p:txBody>
-          <a:bodyPr wrap="square" anchor="t" lIns="0" rIns="0" tIns="0" bIns="0">
+          <a:bodyPr wrap="square" lIns="0" tIns="0" rIns="0" bIns="0" anchor="t">
             <a:spAutoFit/>
           </a:bodyPr>
           <a:lstStyle/>
@@ -7834,7 +7941,7 @@
           <a:noFill/>
         </p:spPr>
         <p:txBody>
-          <a:bodyPr wrap="square" anchor="t" lIns="0" rIns="0" tIns="0" bIns="0">
+          <a:bodyPr wrap="square" lIns="0" tIns="0" rIns="0" bIns="0" anchor="t">
             <a:spAutoFit/>
           </a:bodyPr>
           <a:lstStyle/>
@@ -7892,7 +7999,7 @@
           <a:noFill/>
         </p:spPr>
         <p:txBody>
-          <a:bodyPr wrap="square" anchor="t" lIns="0" rIns="0" tIns="0" bIns="0">
+          <a:bodyPr wrap="square" lIns="0" tIns="0" rIns="0" bIns="0" anchor="t">
             <a:spAutoFit/>
           </a:bodyPr>
           <a:lstStyle/>
@@ -7985,6 +8092,7 @@
           <a:lstStyle/>
           <a:p>
             <a:pPr algn="ctr"/>
+            <a:endParaRPr/>
           </a:p>
         </p:txBody>
       </p:sp>
@@ -8029,6 +8137,7 @@
           <a:lstStyle/>
           <a:p>
             <a:pPr algn="ctr"/>
+            <a:endParaRPr/>
           </a:p>
         </p:txBody>
       </p:sp>
@@ -8073,6 +8182,7 @@
           <a:lstStyle/>
           <a:p>
             <a:pPr algn="ctr"/>
+            <a:endParaRPr/>
           </a:p>
         </p:txBody>
       </p:sp>
@@ -8117,6 +8227,7 @@
           <a:lstStyle/>
           <a:p>
             <a:pPr algn="ctr"/>
+            <a:endParaRPr/>
           </a:p>
         </p:txBody>
       </p:sp>
@@ -8161,6 +8272,7 @@
           <a:lstStyle/>
           <a:p>
             <a:pPr algn="ctr"/>
+            <a:endParaRPr/>
           </a:p>
         </p:txBody>
       </p:sp>
@@ -8205,6 +8317,7 @@
           <a:lstStyle/>
           <a:p>
             <a:pPr algn="ctr"/>
+            <a:endParaRPr/>
           </a:p>
         </p:txBody>
       </p:sp>
@@ -8249,6 +8362,7 @@
           <a:lstStyle/>
           <a:p>
             <a:pPr algn="ctr"/>
+            <a:endParaRPr/>
           </a:p>
         </p:txBody>
       </p:sp>
@@ -8293,6 +8407,7 @@
           <a:lstStyle/>
           <a:p>
             <a:pPr algn="ctr"/>
+            <a:endParaRPr/>
           </a:p>
         </p:txBody>
       </p:sp>
@@ -8337,6 +8452,7 @@
           <a:lstStyle/>
           <a:p>
             <a:pPr algn="ctr"/>
+            <a:endParaRPr/>
           </a:p>
         </p:txBody>
       </p:sp>
@@ -8357,7 +8473,7 @@
           <a:noFill/>
         </p:spPr>
         <p:txBody>
-          <a:bodyPr wrap="square" anchor="t" lIns="0" rIns="0" tIns="0" bIns="0">
+          <a:bodyPr wrap="square" lIns="0" tIns="0" rIns="0" bIns="0" anchor="t">
             <a:spAutoFit/>
           </a:bodyPr>
           <a:lstStyle/>
@@ -8393,7 +8509,7 @@
 </file>
 
 <file path=ppt/slides/slide7.xml><?xml version="1.0" encoding="utf-8"?>
-<p:sld xmlns:a="http://schemas.openxmlformats.org/drawingml/2006/main" xmlns:p="http://schemas.openxmlformats.org/presentationml/2006/main" xmlns:r="http://schemas.openxmlformats.org/officeDocument/2006/relationships">
+<p:sld xmlns:a="http://schemas.openxmlformats.org/drawingml/2006/main" xmlns:r="http://schemas.openxmlformats.org/officeDocument/2006/relationships" xmlns:p="http://schemas.openxmlformats.org/presentationml/2006/main">
   <p:cSld>
     <p:spTree>
       <p:nvGrpSpPr>
@@ -8401,7 +8517,14 @@
         <p:cNvGrpSpPr/>
         <p:nvPr/>
       </p:nvGrpSpPr>
-      <p:grpSpPr/>
+      <p:grpSpPr>
+        <a:xfrm>
+          <a:off x="0" y="0"/>
+          <a:ext cx="0" cy="0"/>
+          <a:chOff x="0" y="0"/>
+          <a:chExt cx="0" cy="0"/>
+        </a:xfrm>
+      </p:grpSpPr>
       <p:sp>
         <p:nvSpPr>
           <p:cNvPr id="2" name="Rectangle 1"/>
@@ -8443,6 +8566,7 @@
           <a:lstStyle/>
           <a:p>
             <a:pPr algn="ctr"/>
+            <a:endParaRPr/>
           </a:p>
         </p:txBody>
       </p:sp>
@@ -8463,7 +8587,7 @@
           <a:noFill/>
         </p:spPr>
         <p:txBody>
-          <a:bodyPr wrap="square" anchor="t" lIns="0" rIns="0" tIns="0" bIns="0">
+          <a:bodyPr wrap="square" lIns="0" tIns="0" rIns="0" bIns="0" anchor="t">
             <a:spAutoFit/>
           </a:bodyPr>
           <a:lstStyle/>
@@ -8498,7 +8622,7 @@
           <a:noFill/>
         </p:spPr>
         <p:txBody>
-          <a:bodyPr wrap="square" anchor="t" lIns="0" rIns="0" tIns="0" bIns="0">
+          <a:bodyPr wrap="square" lIns="0" tIns="0" rIns="0" bIns="0" anchor="t">
             <a:spAutoFit/>
           </a:bodyPr>
           <a:lstStyle/>
@@ -8537,7 +8661,7 @@
           <a:noFill/>
         </p:spPr>
         <p:txBody>
-          <a:bodyPr wrap="square" anchor="t" lIns="0" rIns="0" tIns="0" bIns="0">
+          <a:bodyPr wrap="square" lIns="0" tIns="0" rIns="0" bIns="0" anchor="t">
             <a:spAutoFit/>
           </a:bodyPr>
           <a:lstStyle/>
@@ -8621,6 +8745,7 @@
           <a:lstStyle/>
           <a:p>
             <a:pPr algn="ctr"/>
+            <a:endParaRPr/>
           </a:p>
         </p:txBody>
       </p:sp>
@@ -8641,7 +8766,7 @@
           <a:noFill/>
         </p:spPr>
         <p:txBody>
-          <a:bodyPr wrap="square" anchor="ctr" lIns="0" rIns="0" tIns="0" bIns="0">
+          <a:bodyPr wrap="square" lIns="0" tIns="0" rIns="0" bIns="0" anchor="ctr">
             <a:spAutoFit/>
           </a:bodyPr>
           <a:lstStyle/>
@@ -8672,7 +8797,7 @@
 </file>
 
 <file path=ppt/slides/slide8.xml><?xml version="1.0" encoding="utf-8"?>
-<p:sld xmlns:a="http://schemas.openxmlformats.org/drawingml/2006/main" xmlns:p="http://schemas.openxmlformats.org/presentationml/2006/main" xmlns:r="http://schemas.openxmlformats.org/officeDocument/2006/relationships">
+<p:sld xmlns:a="http://schemas.openxmlformats.org/drawingml/2006/main" xmlns:r="http://schemas.openxmlformats.org/officeDocument/2006/relationships" xmlns:p="http://schemas.openxmlformats.org/presentationml/2006/main">
   <p:cSld>
     <p:spTree>
       <p:nvGrpSpPr>
@@ -8680,7 +8805,14 @@
         <p:cNvGrpSpPr/>
         <p:nvPr/>
       </p:nvGrpSpPr>
-      <p:grpSpPr/>
+      <p:grpSpPr>
+        <a:xfrm>
+          <a:off x="0" y="0"/>
+          <a:ext cx="0" cy="0"/>
+          <a:chOff x="0" y="0"/>
+          <a:chExt cx="0" cy="0"/>
+        </a:xfrm>
+      </p:grpSpPr>
       <p:sp>
         <p:nvSpPr>
           <p:cNvPr id="2" name="Rectangle 1"/>
@@ -8722,6 +8854,7 @@
           <a:lstStyle/>
           <a:p>
             <a:pPr algn="ctr"/>
+            <a:endParaRPr/>
           </a:p>
         </p:txBody>
       </p:sp>
@@ -8742,7 +8875,7 @@
           <a:noFill/>
         </p:spPr>
         <p:txBody>
-          <a:bodyPr wrap="square" anchor="t" lIns="0" rIns="0" tIns="0" bIns="0">
+          <a:bodyPr wrap="square" lIns="0" tIns="0" rIns="0" bIns="0" anchor="t">
             <a:spAutoFit/>
           </a:bodyPr>
           <a:lstStyle/>
@@ -8777,7 +8910,7 @@
           <a:noFill/>
         </p:spPr>
         <p:txBody>
-          <a:bodyPr wrap="square" anchor="t" lIns="0" rIns="0" tIns="0" bIns="0">
+          <a:bodyPr wrap="square" lIns="0" tIns="0" rIns="0" bIns="0" anchor="t">
             <a:spAutoFit/>
           </a:bodyPr>
           <a:lstStyle/>
@@ -8861,6 +8994,7 @@
           <a:lstStyle/>
           <a:p>
             <a:pPr algn="ctr"/>
+            <a:endParaRPr/>
           </a:p>
         </p:txBody>
       </p:sp>
@@ -8881,7 +9015,7 @@
           <a:noFill/>
         </p:spPr>
         <p:txBody>
-          <a:bodyPr wrap="square" anchor="t" lIns="0" rIns="0" tIns="0" bIns="0">
+          <a:bodyPr wrap="square" lIns="0" tIns="0" rIns="0" bIns="0" anchor="t">
             <a:spAutoFit/>
           </a:bodyPr>
           <a:lstStyle/>
@@ -8965,6 +9099,7 @@
           <a:lstStyle/>
           <a:p>
             <a:pPr algn="ctr"/>
+            <a:endParaRPr/>
           </a:p>
         </p:txBody>
       </p:sp>
@@ -8985,7 +9120,7 @@
           <a:noFill/>
         </p:spPr>
         <p:txBody>
-          <a:bodyPr wrap="square" anchor="t" lIns="0" rIns="0" tIns="0" bIns="0">
+          <a:bodyPr wrap="square" lIns="0" tIns="0" rIns="0" bIns="0" anchor="t">
             <a:spAutoFit/>
           </a:bodyPr>
           <a:lstStyle/>
@@ -9069,6 +9204,7 @@
           <a:lstStyle/>
           <a:p>
             <a:pPr algn="ctr"/>
+            <a:endParaRPr/>
           </a:p>
         </p:txBody>
       </p:sp>
@@ -9089,7 +9225,7 @@
           <a:noFill/>
         </p:spPr>
         <p:txBody>
-          <a:bodyPr wrap="square" anchor="t" lIns="0" rIns="0" tIns="0" bIns="0">
+          <a:bodyPr wrap="square" lIns="0" tIns="0" rIns="0" bIns="0" anchor="t">
             <a:spAutoFit/>
           </a:bodyPr>
           <a:lstStyle/>
@@ -9173,6 +9309,7 @@
           <a:lstStyle/>
           <a:p>
             <a:pPr algn="ctr"/>
+            <a:endParaRPr/>
           </a:p>
         </p:txBody>
       </p:sp>
@@ -9193,7 +9330,7 @@
           <a:noFill/>
         </p:spPr>
         <p:txBody>
-          <a:bodyPr wrap="square" anchor="t" lIns="0" rIns="0" tIns="0" bIns="0">
+          <a:bodyPr wrap="square" lIns="0" tIns="0" rIns="0" bIns="0" anchor="t">
             <a:spAutoFit/>
           </a:bodyPr>
           <a:lstStyle/>
@@ -9220,7 +9357,7 @@
 </file>
 
 <file path=ppt/slides/slide9.xml><?xml version="1.0" encoding="utf-8"?>
-<p:sld xmlns:a="http://schemas.openxmlformats.org/drawingml/2006/main" xmlns:p="http://schemas.openxmlformats.org/presentationml/2006/main" xmlns:r="http://schemas.openxmlformats.org/officeDocument/2006/relationships">
+<p:sld xmlns:a="http://schemas.openxmlformats.org/drawingml/2006/main" xmlns:r="http://schemas.openxmlformats.org/officeDocument/2006/relationships" xmlns:p="http://schemas.openxmlformats.org/presentationml/2006/main">
   <p:cSld>
     <p:spTree>
       <p:nvGrpSpPr>
@@ -9228,7 +9365,14 @@
         <p:cNvGrpSpPr/>
         <p:nvPr/>
       </p:nvGrpSpPr>
-      <p:grpSpPr/>
+      <p:grpSpPr>
+        <a:xfrm>
+          <a:off x="0" y="0"/>
+          <a:ext cx="0" cy="0"/>
+          <a:chOff x="0" y="0"/>
+          <a:chExt cx="0" cy="0"/>
+        </a:xfrm>
+      </p:grpSpPr>
       <p:sp>
         <p:nvSpPr>
           <p:cNvPr id="2" name="Rectangle 1"/>
@@ -9270,6 +9414,7 @@
           <a:lstStyle/>
           <a:p>
             <a:pPr algn="ctr"/>
+            <a:endParaRPr/>
           </a:p>
         </p:txBody>
       </p:sp>
@@ -9290,7 +9435,7 @@
           <a:noFill/>
         </p:spPr>
         <p:txBody>
-          <a:bodyPr wrap="square" anchor="t" lIns="0" rIns="0" tIns="0" bIns="0">
+          <a:bodyPr wrap="square" lIns="0" tIns="0" rIns="0" bIns="0" anchor="t">
             <a:spAutoFit/>
           </a:bodyPr>
           <a:lstStyle/>
@@ -9325,7 +9470,7 @@
           <a:noFill/>
         </p:spPr>
         <p:txBody>
-          <a:bodyPr wrap="square" anchor="t" lIns="0" rIns="0" tIns="0" bIns="0">
+          <a:bodyPr wrap="square" lIns="0" tIns="0" rIns="0" bIns="0" anchor="t">
             <a:spAutoFit/>
           </a:bodyPr>
           <a:lstStyle/>
@@ -9373,7 +9518,7 @@
           <a:noFill/>
         </p:spPr>
         <p:txBody>
-          <a:bodyPr wrap="square" anchor="t" lIns="0" rIns="0" tIns="0" bIns="0">
+          <a:bodyPr wrap="square" lIns="0" tIns="0" rIns="0" bIns="0" anchor="t">
             <a:spAutoFit/>
           </a:bodyPr>
           <a:lstStyle/>
